--- a/mod1/assessment_demo_compilato.pptx
+++ b/mod1/assessment_demo_compilato.pptx
@@ -11,6 +11,10 @@
     <p:sldId id="259" r:id="rId10"/>
     <p:sldId id="260" r:id="rId11"/>
     <p:sldId id="261" r:id="rId12"/>
+    <p:sldId id="262" r:id="rId13"/>
+    <p:sldId id="263" r:id="rId14"/>
+    <p:sldId id="264" r:id="rId15"/>
+    <p:sldId id="265" r:id="rId16"/>
   </p:sldIdLst>
   <p:sldSz cx="12191695" cy="6858000" type="screen4x3"/>
   <p:notesSz cx="6858000" cy="9144000"/>
@@ -3744,6 +3748,161 @@
 </p:sld>
 </file>
 
+<file path=ppt/slides/slide10.xml><?xml version="1.0" encoding="utf-8"?>
+<p:sld xmlns:a="http://schemas.openxmlformats.org/drawingml/2006/main" xmlns:p="http://schemas.openxmlformats.org/presentationml/2006/main" xmlns:r="http://schemas.openxmlformats.org/officeDocument/2006/relationships">
+  <p:cSld>
+    <p:spTree>
+      <p:nvGrpSpPr>
+        <p:cNvPr id="1" name=""/>
+        <p:cNvGrpSpPr/>
+        <p:nvPr/>
+      </p:nvGrpSpPr>
+      <p:grpSpPr/>
+      <p:sp>
+        <p:nvSpPr>
+          <p:cNvPr id="2" name="Rectangle 1"/>
+          <p:cNvSpPr/>
+          <p:nvPr/>
+        </p:nvSpPr>
+        <p:spPr>
+          <a:xfrm>
+            <a:off x="502920" y="384048"/>
+            <a:ext cx="1051560" cy="100584"/>
+          </a:xfrm>
+          <a:prstGeom prst="rect">
+            <a:avLst/>
+          </a:prstGeom>
+          <a:solidFill>
+            <a:srgbClr val="E86A17"/>
+          </a:solidFill>
+          <a:ln>
+            <a:noFill/>
+          </a:ln>
+        </p:spPr>
+        <p:style>
+          <a:lnRef idx="1">
+            <a:schemeClr val="accent1"/>
+          </a:lnRef>
+          <a:fillRef idx="3">
+            <a:schemeClr val="accent1"/>
+          </a:fillRef>
+          <a:effectRef idx="2">
+            <a:schemeClr val="accent1"/>
+          </a:effectRef>
+          <a:fontRef idx="minor">
+            <a:schemeClr val="lt1"/>
+          </a:fontRef>
+        </p:style>
+        <p:txBody>
+          <a:bodyPr rtlCol="0" anchor="ctr"/>
+          <a:lstStyle/>
+          <a:p>
+            <a:pPr algn="ctr"/>
+          </a:p>
+        </p:txBody>
+      </p:sp>
+      <p:sp>
+        <p:nvSpPr>
+          <p:cNvPr id="3" name="TextBox 2"/>
+          <p:cNvSpPr txBox="1"/>
+          <p:nvPr/>
+        </p:nvSpPr>
+        <p:spPr>
+          <a:xfrm>
+            <a:off x="502920" y="475488"/>
+            <a:ext cx="10515600" cy="731520"/>
+          </a:xfrm>
+          <a:prstGeom prst="rect">
+            <a:avLst/>
+          </a:prstGeom>
+          <a:noFill/>
+        </p:spPr>
+        <p:txBody>
+          <a:bodyPr wrap="square" anchor="t" lIns="0" rIns="0" tIns="0" bIns="0">
+            <a:spAutoFit/>
+          </a:bodyPr>
+          <a:lstStyle/>
+          <a:p>
+            <a:pPr algn="l"/>
+            <a:r>
+              <a:rPr sz="3000" b="1">
+                <a:solidFill>
+                  <a:srgbClr val="1A1A1A"/>
+                </a:solidFill>
+                <a:latin typeface="Calibri"/>
+              </a:rPr>
+              <a:t>DESCRIZIONI PER PUNTEGGIO (2/2)</a:t>
+            </a:r>
+          </a:p>
+        </p:txBody>
+      </p:sp>
+      <p:sp>
+        <p:nvSpPr>
+          <p:cNvPr id="4" name="TextBox 3"/>
+          <p:cNvSpPr txBox="1"/>
+          <p:nvPr/>
+        </p:nvSpPr>
+        <p:spPr>
+          <a:xfrm>
+            <a:off x="502920" y="1078992"/>
+            <a:ext cx="10515600" cy="365760"/>
+          </a:xfrm>
+          <a:prstGeom prst="rect">
+            <a:avLst/>
+          </a:prstGeom>
+          <a:noFill/>
+        </p:spPr>
+        <p:txBody>
+          <a:bodyPr wrap="square" anchor="t" lIns="0" rIns="0" tIns="0" bIns="0">
+            <a:spAutoFit/>
+          </a:bodyPr>
+          <a:lstStyle/>
+          <a:p>
+            <a:pPr algn="l"/>
+            <a:r>
+              <a:rPr sz="1300" b="0">
+                <a:solidFill>
+                  <a:srgbClr val="555555"/>
+                </a:solidFill>
+                <a:latin typeface="Calibri"/>
+              </a:rPr>
+              <a:t>Testo di riferimento del punteggio comunicato (asse Y), 5 temi per slide</a:t>
+            </a:r>
+          </a:p>
+        </p:txBody>
+      </p:sp>
+      <p:sp>
+        <p:nvSpPr>
+          <p:cNvPr id="5" name="TextBox 4"/>
+          <p:cNvSpPr txBox="1"/>
+          <p:nvPr/>
+        </p:nvSpPr>
+        <p:spPr>
+          <a:xfrm>
+            <a:off x="502920" y="1554480"/>
+            <a:ext cx="11201400" cy="4846320"/>
+          </a:xfrm>
+          <a:prstGeom prst="rect">
+            <a:avLst/>
+          </a:prstGeom>
+          <a:noFill/>
+        </p:spPr>
+        <p:txBody>
+          <a:bodyPr wrap="square" anchor="t" lIns="0" rIns="0" tIns="0" bIns="0">
+            <a:spAutoFit/>
+          </a:bodyPr>
+          <a:lstStyle/>
+          <a:p/>
+        </p:txBody>
+      </p:sp>
+    </p:spTree>
+  </p:cSld>
+  <p:clrMapOvr>
+    <a:masterClrMapping/>
+  </p:clrMapOvr>
+</p:sld>
+</file>
+
 <file path=ppt/slides/slide2.xml><?xml version="1.0" encoding="utf-8"?>
 <p:sld xmlns:a="http://schemas.openxmlformats.org/drawingml/2006/main" xmlns:p="http://schemas.openxmlformats.org/presentationml/2006/main" xmlns:r="http://schemas.openxmlformats.org/officeDocument/2006/relationships">
   <p:cSld>
@@ -7450,14 +7609,575 @@
         </p:blipFill>
         <p:spPr>
           <a:xfrm>
-            <a:off x="502920" y="1600200"/>
-            <a:ext cx="3931920" cy="3931920"/>
+            <a:off x="502920" y="1811827"/>
+            <a:ext cx="3931920" cy="3508665"/>
           </a:xfrm>
           <a:prstGeom prst="rect">
             <a:avLst/>
           </a:prstGeom>
         </p:spPr>
       </p:pic>
+    </p:spTree>
+  </p:cSld>
+  <p:clrMapOvr>
+    <a:masterClrMapping/>
+  </p:clrMapOvr>
+</p:sld>
+</file>
+
+<file path=ppt/slides/slide7.xml><?xml version="1.0" encoding="utf-8"?>
+<p:sld xmlns:a="http://schemas.openxmlformats.org/drawingml/2006/main" xmlns:p="http://schemas.openxmlformats.org/presentationml/2006/main" xmlns:r="http://schemas.openxmlformats.org/officeDocument/2006/relationships">
+  <p:cSld>
+    <p:spTree>
+      <p:nvGrpSpPr>
+        <p:cNvPr id="1" name=""/>
+        <p:cNvGrpSpPr/>
+        <p:nvPr/>
+      </p:nvGrpSpPr>
+      <p:grpSpPr/>
+      <p:sp>
+        <p:nvSpPr>
+          <p:cNvPr id="2" name="Rectangle 1"/>
+          <p:cNvSpPr/>
+          <p:nvPr/>
+        </p:nvSpPr>
+        <p:spPr>
+          <a:xfrm>
+            <a:off x="502920" y="384048"/>
+            <a:ext cx="1051560" cy="100584"/>
+          </a:xfrm>
+          <a:prstGeom prst="rect">
+            <a:avLst/>
+          </a:prstGeom>
+          <a:solidFill>
+            <a:srgbClr val="E86A17"/>
+          </a:solidFill>
+          <a:ln>
+            <a:noFill/>
+          </a:ln>
+        </p:spPr>
+        <p:style>
+          <a:lnRef idx="1">
+            <a:schemeClr val="accent1"/>
+          </a:lnRef>
+          <a:fillRef idx="3">
+            <a:schemeClr val="accent1"/>
+          </a:fillRef>
+          <a:effectRef idx="2">
+            <a:schemeClr val="accent1"/>
+          </a:effectRef>
+          <a:fontRef idx="minor">
+            <a:schemeClr val="lt1"/>
+          </a:fontRef>
+        </p:style>
+        <p:txBody>
+          <a:bodyPr rtlCol="0" anchor="ctr"/>
+          <a:lstStyle/>
+          <a:p>
+            <a:pPr algn="ctr"/>
+          </a:p>
+        </p:txBody>
+      </p:sp>
+      <p:sp>
+        <p:nvSpPr>
+          <p:cNvPr id="3" name="TextBox 2"/>
+          <p:cNvSpPr txBox="1"/>
+          <p:nvPr/>
+        </p:nvSpPr>
+        <p:spPr>
+          <a:xfrm>
+            <a:off x="502920" y="475488"/>
+            <a:ext cx="10515600" cy="731520"/>
+          </a:xfrm>
+          <a:prstGeom prst="rect">
+            <a:avLst/>
+          </a:prstGeom>
+          <a:noFill/>
+        </p:spPr>
+        <p:txBody>
+          <a:bodyPr wrap="square" anchor="t" lIns="0" rIns="0" tIns="0" bIns="0">
+            <a:spAutoFit/>
+          </a:bodyPr>
+          <a:lstStyle/>
+          <a:p>
+            <a:pPr algn="l"/>
+            <a:r>
+              <a:rPr sz="3000" b="1">
+                <a:solidFill>
+                  <a:srgbClr val="1A1A1A"/>
+                </a:solidFill>
+                <a:latin typeface="Calibri"/>
+              </a:rPr>
+              <a:t>PROFILO RADAR ESTERNO</a:t>
+            </a:r>
+          </a:p>
+        </p:txBody>
+      </p:sp>
+      <p:sp>
+        <p:nvSpPr>
+          <p:cNvPr id="4" name="TextBox 3"/>
+          <p:cNvSpPr txBox="1"/>
+          <p:nvPr/>
+        </p:nvSpPr>
+        <p:spPr>
+          <a:xfrm>
+            <a:off x="502920" y="1078992"/>
+            <a:ext cx="10515600" cy="365760"/>
+          </a:xfrm>
+          <a:prstGeom prst="rect">
+            <a:avLst/>
+          </a:prstGeom>
+          <a:noFill/>
+        </p:spPr>
+        <p:txBody>
+          <a:bodyPr wrap="square" anchor="t" lIns="0" rIns="0" tIns="0" bIns="0">
+            <a:spAutoFit/>
+          </a:bodyPr>
+          <a:lstStyle/>
+          <a:p>
+            <a:pPr algn="l"/>
+            <a:r>
+              <a:rPr sz="1300" b="0">
+                <a:solidFill>
+                  <a:srgbClr val="555555"/>
+                </a:solidFill>
+                <a:latin typeface="Calibri"/>
+              </a:rPr>
+              <a:t>Punteggi di reporting e delle dimensioni DEIA: azienda vs media dei concorrenti</a:t>
+            </a:r>
+          </a:p>
+        </p:txBody>
+      </p:sp>
+      <p:sp>
+        <p:nvSpPr>
+          <p:cNvPr id="5" name="TextBox 4"/>
+          <p:cNvSpPr txBox="1"/>
+          <p:nvPr/>
+        </p:nvSpPr>
+        <p:spPr>
+          <a:xfrm>
+            <a:off x="502920" y="1508760"/>
+            <a:ext cx="5394960" cy="2514600"/>
+          </a:xfrm>
+          <a:prstGeom prst="rect">
+            <a:avLst/>
+          </a:prstGeom>
+          <a:noFill/>
+        </p:spPr>
+        <p:txBody>
+          <a:bodyPr wrap="square" anchor="t" lIns="0" rIns="0" tIns="0" bIns="0">
+            <a:spAutoFit/>
+          </a:bodyPr>
+          <a:lstStyle/>
+          <a:p/>
+        </p:txBody>
+      </p:sp>
+      <p:sp>
+        <p:nvSpPr>
+          <p:cNvPr id="6" name="TextBox 5"/>
+          <p:cNvSpPr txBox="1"/>
+          <p:nvPr/>
+        </p:nvSpPr>
+        <p:spPr>
+          <a:xfrm>
+            <a:off x="6172200" y="1508760"/>
+            <a:ext cx="5394960" cy="2514600"/>
+          </a:xfrm>
+          <a:prstGeom prst="rect">
+            <a:avLst/>
+          </a:prstGeom>
+          <a:noFill/>
+        </p:spPr>
+        <p:txBody>
+          <a:bodyPr wrap="square" anchor="t" lIns="0" rIns="0" tIns="0" bIns="0">
+            <a:spAutoFit/>
+          </a:bodyPr>
+          <a:lstStyle/>
+          <a:p/>
+        </p:txBody>
+      </p:sp>
+      <p:sp>
+        <p:nvSpPr>
+          <p:cNvPr id="7" name="TextBox 6"/>
+          <p:cNvSpPr txBox="1"/>
+          <p:nvPr/>
+        </p:nvSpPr>
+        <p:spPr>
+          <a:xfrm>
+            <a:off x="502920" y="4206240"/>
+            <a:ext cx="5394960" cy="2514600"/>
+          </a:xfrm>
+          <a:prstGeom prst="rect">
+            <a:avLst/>
+          </a:prstGeom>
+          <a:noFill/>
+        </p:spPr>
+        <p:txBody>
+          <a:bodyPr wrap="square" anchor="t" lIns="0" rIns="0" tIns="0" bIns="0">
+            <a:spAutoFit/>
+          </a:bodyPr>
+          <a:lstStyle/>
+          <a:p/>
+        </p:txBody>
+      </p:sp>
+      <p:sp>
+        <p:nvSpPr>
+          <p:cNvPr id="8" name="TextBox 7"/>
+          <p:cNvSpPr txBox="1"/>
+          <p:nvPr/>
+        </p:nvSpPr>
+        <p:spPr>
+          <a:xfrm>
+            <a:off x="6172200" y="4206240"/>
+            <a:ext cx="5394960" cy="2514600"/>
+          </a:xfrm>
+          <a:prstGeom prst="rect">
+            <a:avLst/>
+          </a:prstGeom>
+          <a:noFill/>
+        </p:spPr>
+        <p:txBody>
+          <a:bodyPr wrap="square" anchor="t" lIns="0" rIns="0" tIns="0" bIns="0">
+            <a:spAutoFit/>
+          </a:bodyPr>
+          <a:lstStyle/>
+          <a:p/>
+        </p:txBody>
+      </p:sp>
+    </p:spTree>
+  </p:cSld>
+  <p:clrMapOvr>
+    <a:masterClrMapping/>
+  </p:clrMapOvr>
+</p:sld>
+</file>
+
+<file path=ppt/slides/slide8.xml><?xml version="1.0" encoding="utf-8"?>
+<p:sld xmlns:a="http://schemas.openxmlformats.org/drawingml/2006/main" xmlns:p="http://schemas.openxmlformats.org/presentationml/2006/main" xmlns:r="http://schemas.openxmlformats.org/officeDocument/2006/relationships">
+  <p:cSld>
+    <p:spTree>
+      <p:nvGrpSpPr>
+        <p:cNvPr id="1" name=""/>
+        <p:cNvGrpSpPr/>
+        <p:nvPr/>
+      </p:nvGrpSpPr>
+      <p:grpSpPr/>
+      <p:sp>
+        <p:nvSpPr>
+          <p:cNvPr id="2" name="Rectangle 1"/>
+          <p:cNvSpPr/>
+          <p:nvPr/>
+        </p:nvSpPr>
+        <p:spPr>
+          <a:xfrm>
+            <a:off x="502920" y="384048"/>
+            <a:ext cx="1051560" cy="100584"/>
+          </a:xfrm>
+          <a:prstGeom prst="rect">
+            <a:avLst/>
+          </a:prstGeom>
+          <a:solidFill>
+            <a:srgbClr val="E86A17"/>
+          </a:solidFill>
+          <a:ln>
+            <a:noFill/>
+          </a:ln>
+        </p:spPr>
+        <p:style>
+          <a:lnRef idx="1">
+            <a:schemeClr val="accent1"/>
+          </a:lnRef>
+          <a:fillRef idx="3">
+            <a:schemeClr val="accent1"/>
+          </a:fillRef>
+          <a:effectRef idx="2">
+            <a:schemeClr val="accent1"/>
+          </a:effectRef>
+          <a:fontRef idx="minor">
+            <a:schemeClr val="lt1"/>
+          </a:fontRef>
+        </p:style>
+        <p:txBody>
+          <a:bodyPr rtlCol="0" anchor="ctr"/>
+          <a:lstStyle/>
+          <a:p>
+            <a:pPr algn="ctr"/>
+          </a:p>
+        </p:txBody>
+      </p:sp>
+      <p:sp>
+        <p:nvSpPr>
+          <p:cNvPr id="3" name="TextBox 2"/>
+          <p:cNvSpPr txBox="1"/>
+          <p:nvPr/>
+        </p:nvSpPr>
+        <p:spPr>
+          <a:xfrm>
+            <a:off x="502920" y="475488"/>
+            <a:ext cx="10515600" cy="731520"/>
+          </a:xfrm>
+          <a:prstGeom prst="rect">
+            <a:avLst/>
+          </a:prstGeom>
+          <a:noFill/>
+        </p:spPr>
+        <p:txBody>
+          <a:bodyPr wrap="square" anchor="t" lIns="0" rIns="0" tIns="0" bIns="0">
+            <a:spAutoFit/>
+          </a:bodyPr>
+          <a:lstStyle/>
+          <a:p>
+            <a:pPr algn="l"/>
+            <a:r>
+              <a:rPr sz="3000" b="1">
+                <a:solidFill>
+                  <a:srgbClr val="1A1A1A"/>
+                </a:solidFill>
+                <a:latin typeface="Calibri"/>
+              </a:rPr>
+              <a:t>MATRICE DI TRASPARENZA</a:t>
+            </a:r>
+          </a:p>
+        </p:txBody>
+      </p:sp>
+      <p:sp>
+        <p:nvSpPr>
+          <p:cNvPr id="4" name="TextBox 3"/>
+          <p:cNvSpPr txBox="1"/>
+          <p:nvPr/>
+        </p:nvSpPr>
+        <p:spPr>
+          <a:xfrm>
+            <a:off x="502920" y="1078992"/>
+            <a:ext cx="10515600" cy="365760"/>
+          </a:xfrm>
+          <a:prstGeom prst="rect">
+            <a:avLst/>
+          </a:prstGeom>
+          <a:noFill/>
+        </p:spPr>
+        <p:txBody>
+          <a:bodyPr wrap="square" anchor="t" lIns="0" rIns="0" tIns="0" bIns="0">
+            <a:spAutoFit/>
+          </a:bodyPr>
+          <a:lstStyle/>
+          <a:p>
+            <a:pPr algn="l"/>
+            <a:r>
+              <a:rPr sz="1300" b="0">
+                <a:solidFill>
+                  <a:srgbClr val="555555"/>
+                </a:solidFill>
+                <a:latin typeface="Calibri"/>
+              </a:rPr>
+              <a:t>Maturità praticata (survey) vs comunicata (reporting) sui 10 temi</a:t>
+            </a:r>
+          </a:p>
+        </p:txBody>
+      </p:sp>
+      <p:sp>
+        <p:nvSpPr>
+          <p:cNvPr id="5" name="TextBox 4"/>
+          <p:cNvSpPr txBox="1"/>
+          <p:nvPr/>
+        </p:nvSpPr>
+        <p:spPr>
+          <a:xfrm>
+            <a:off x="502920" y="1554480"/>
+            <a:ext cx="5212080" cy="4846320"/>
+          </a:xfrm>
+          <a:prstGeom prst="rect">
+            <a:avLst/>
+          </a:prstGeom>
+          <a:noFill/>
+        </p:spPr>
+        <p:txBody>
+          <a:bodyPr wrap="square" anchor="t" lIns="0" rIns="0" tIns="0" bIns="0">
+            <a:spAutoFit/>
+          </a:bodyPr>
+          <a:lstStyle/>
+          <a:p/>
+        </p:txBody>
+      </p:sp>
+      <p:sp>
+        <p:nvSpPr>
+          <p:cNvPr id="6" name="TextBox 5"/>
+          <p:cNvSpPr txBox="1"/>
+          <p:nvPr/>
+        </p:nvSpPr>
+        <p:spPr>
+          <a:xfrm>
+            <a:off x="5989320" y="1554480"/>
+            <a:ext cx="5715000" cy="4846320"/>
+          </a:xfrm>
+          <a:prstGeom prst="rect">
+            <a:avLst/>
+          </a:prstGeom>
+          <a:noFill/>
+        </p:spPr>
+        <p:txBody>
+          <a:bodyPr wrap="square" anchor="t" lIns="0" rIns="0" tIns="0" bIns="0">
+            <a:spAutoFit/>
+          </a:bodyPr>
+          <a:lstStyle/>
+          <a:p/>
+        </p:txBody>
+      </p:sp>
+    </p:spTree>
+  </p:cSld>
+  <p:clrMapOvr>
+    <a:masterClrMapping/>
+  </p:clrMapOvr>
+</p:sld>
+</file>
+
+<file path=ppt/slides/slide9.xml><?xml version="1.0" encoding="utf-8"?>
+<p:sld xmlns:a="http://schemas.openxmlformats.org/drawingml/2006/main" xmlns:p="http://schemas.openxmlformats.org/presentationml/2006/main" xmlns:r="http://schemas.openxmlformats.org/officeDocument/2006/relationships">
+  <p:cSld>
+    <p:spTree>
+      <p:nvGrpSpPr>
+        <p:cNvPr id="1" name=""/>
+        <p:cNvGrpSpPr/>
+        <p:nvPr/>
+      </p:nvGrpSpPr>
+      <p:grpSpPr/>
+      <p:sp>
+        <p:nvSpPr>
+          <p:cNvPr id="2" name="Rectangle 1"/>
+          <p:cNvSpPr/>
+          <p:nvPr/>
+        </p:nvSpPr>
+        <p:spPr>
+          <a:xfrm>
+            <a:off x="502920" y="384048"/>
+            <a:ext cx="1051560" cy="100584"/>
+          </a:xfrm>
+          <a:prstGeom prst="rect">
+            <a:avLst/>
+          </a:prstGeom>
+          <a:solidFill>
+            <a:srgbClr val="E86A17"/>
+          </a:solidFill>
+          <a:ln>
+            <a:noFill/>
+          </a:ln>
+        </p:spPr>
+        <p:style>
+          <a:lnRef idx="1">
+            <a:schemeClr val="accent1"/>
+          </a:lnRef>
+          <a:fillRef idx="3">
+            <a:schemeClr val="accent1"/>
+          </a:fillRef>
+          <a:effectRef idx="2">
+            <a:schemeClr val="accent1"/>
+          </a:effectRef>
+          <a:fontRef idx="minor">
+            <a:schemeClr val="lt1"/>
+          </a:fontRef>
+        </p:style>
+        <p:txBody>
+          <a:bodyPr rtlCol="0" anchor="ctr"/>
+          <a:lstStyle/>
+          <a:p>
+            <a:pPr algn="ctr"/>
+          </a:p>
+        </p:txBody>
+      </p:sp>
+      <p:sp>
+        <p:nvSpPr>
+          <p:cNvPr id="3" name="TextBox 2"/>
+          <p:cNvSpPr txBox="1"/>
+          <p:nvPr/>
+        </p:nvSpPr>
+        <p:spPr>
+          <a:xfrm>
+            <a:off x="502920" y="475488"/>
+            <a:ext cx="10515600" cy="731520"/>
+          </a:xfrm>
+          <a:prstGeom prst="rect">
+            <a:avLst/>
+          </a:prstGeom>
+          <a:noFill/>
+        </p:spPr>
+        <p:txBody>
+          <a:bodyPr wrap="square" anchor="t" lIns="0" rIns="0" tIns="0" bIns="0">
+            <a:spAutoFit/>
+          </a:bodyPr>
+          <a:lstStyle/>
+          <a:p>
+            <a:pPr algn="l"/>
+            <a:r>
+              <a:rPr sz="3000" b="1">
+                <a:solidFill>
+                  <a:srgbClr val="1A1A1A"/>
+                </a:solidFill>
+                <a:latin typeface="Calibri"/>
+              </a:rPr>
+              <a:t>DESCRIZIONI PER PUNTEGGIO (1/2)</a:t>
+            </a:r>
+          </a:p>
+        </p:txBody>
+      </p:sp>
+      <p:sp>
+        <p:nvSpPr>
+          <p:cNvPr id="4" name="TextBox 3"/>
+          <p:cNvSpPr txBox="1"/>
+          <p:nvPr/>
+        </p:nvSpPr>
+        <p:spPr>
+          <a:xfrm>
+            <a:off x="502920" y="1078992"/>
+            <a:ext cx="10515600" cy="365760"/>
+          </a:xfrm>
+          <a:prstGeom prst="rect">
+            <a:avLst/>
+          </a:prstGeom>
+          <a:noFill/>
+        </p:spPr>
+        <p:txBody>
+          <a:bodyPr wrap="square" anchor="t" lIns="0" rIns="0" tIns="0" bIns="0">
+            <a:spAutoFit/>
+          </a:bodyPr>
+          <a:lstStyle/>
+          <a:p>
+            <a:pPr algn="l"/>
+            <a:r>
+              <a:rPr sz="1300" b="0">
+                <a:solidFill>
+                  <a:srgbClr val="555555"/>
+                </a:solidFill>
+                <a:latin typeface="Calibri"/>
+              </a:rPr>
+              <a:t>Testo di riferimento del punteggio comunicato (asse Y), 5 temi per slide</a:t>
+            </a:r>
+          </a:p>
+        </p:txBody>
+      </p:sp>
+      <p:sp>
+        <p:nvSpPr>
+          <p:cNvPr id="5" name="TextBox 4"/>
+          <p:cNvSpPr txBox="1"/>
+          <p:nvPr/>
+        </p:nvSpPr>
+        <p:spPr>
+          <a:xfrm>
+            <a:off x="502920" y="1554480"/>
+            <a:ext cx="11201400" cy="4846320"/>
+          </a:xfrm>
+          <a:prstGeom prst="rect">
+            <a:avLst/>
+          </a:prstGeom>
+          <a:noFill/>
+        </p:spPr>
+        <p:txBody>
+          <a:bodyPr wrap="square" anchor="t" lIns="0" rIns="0" tIns="0" bIns="0">
+            <a:spAutoFit/>
+          </a:bodyPr>
+          <a:lstStyle/>
+          <a:p/>
+        </p:txBody>
+      </p:sp>
     </p:spTree>
   </p:cSld>
   <p:clrMapOvr>
